--- a/Town_Meeting_Video_Slides.pptx
+++ b/Town_Meeting_Video_Slides.pptx
@@ -4732,16 +4732,40 @@
           </a:p>
         </p:txBody>
       </p:sp>
-      <p:sp>
-        <p:nvSpPr>
-          <p:cNvPr id="4" name="TextBox 3"/>
+      <p:pic>
+        <p:nvPicPr>
+          <p:cNvPr id="4" name="Picture 3" descr="gas_leaf_blower.jpg"/>
+          <p:cNvPicPr>
+            <a:picLocks noChangeAspect="1"/>
+          </p:cNvPicPr>
+          <p:nvPr/>
+        </p:nvPicPr>
+        <p:blipFill>
+          <a:blip r:embed="rId3"/>
+          <a:stretch>
+            <a:fillRect/>
+          </a:stretch>
+        </p:blipFill>
+        <p:spPr>
+          <a:xfrm>
+            <a:off x="5029200" y="1097280"/>
+            <a:ext cx="3840480" cy="2880360"/>
+          </a:xfrm>
+          <a:prstGeom prst="rect">
+            <a:avLst/>
+          </a:prstGeom>
+        </p:spPr>
+      </p:pic>
+      <p:sp>
+        <p:nvSpPr>
+          <p:cNvPr id="5" name="TextBox 4"/>
           <p:cNvSpPr txBox="1"/>
           <p:nvPr/>
         </p:nvSpPr>
         <p:spPr>
           <a:xfrm>
             <a:off x="311810" y="1005840"/>
-            <a:ext cx="7772400" cy="3200400"/>
+            <a:ext cx="4572000" cy="3200400"/>
           </a:xfrm>
           <a:prstGeom prst="rect">
             <a:avLst/>
@@ -4808,25 +4832,6 @@
             </a:pPr>
             <a:r>
               <a:t>They wanted people to switch to quieter, electric blowers — or just use a rake!</a:t>
-            </a:r>
-          </a:p>
-          <a:p>
-            <a:pPr>
-              <a:lnSpc>
-                <a:spcPts val="1920"/>
-              </a:lnSpc>
-              <a:spcAft>
-                <a:spcPts val="400"/>
-              </a:spcAft>
-              <a:defRPr sz="1600">
-                <a:solidFill>
-                  <a:srgbClr val="1A1A1A"/>
-                </a:solidFill>
-                <a:latin typeface="Calibri"/>
-              </a:defRPr>
-            </a:pPr>
-            <a:r>
-              <a:t>[PLACEHOLDER: Insert photo of gas leaf blower here]</a:t>
             </a:r>
           </a:p>
         </p:txBody>

--- a/Town_Meeting_Video_Slides.pptx
+++ b/Town_Meeting_Video_Slides.pptx
@@ -5516,16 +5516,40 @@
           </a:p>
         </p:txBody>
       </p:sp>
-      <p:sp>
-        <p:nvSpPr>
-          <p:cNvPr id="4" name="TextBox 3"/>
+      <p:pic>
+        <p:nvPicPr>
+          <p:cNvPr id="4" name="Picture 3" descr="artificial_turf_field.jpg"/>
+          <p:cNvPicPr>
+            <a:picLocks noChangeAspect="1"/>
+          </p:cNvPicPr>
+          <p:nvPr/>
+        </p:nvPicPr>
+        <p:blipFill>
+          <a:blip r:embed="rId3"/>
+          <a:stretch>
+            <a:fillRect/>
+          </a:stretch>
+        </p:blipFill>
+        <p:spPr>
+          <a:xfrm>
+            <a:off x="5029200" y="1097280"/>
+            <a:ext cx="3840480" cy="2880360"/>
+          </a:xfrm>
+          <a:prstGeom prst="rect">
+            <a:avLst/>
+          </a:prstGeom>
+        </p:spPr>
+      </p:pic>
+      <p:sp>
+        <p:nvSpPr>
+          <p:cNvPr id="5" name="TextBox 4"/>
           <p:cNvSpPr txBox="1"/>
           <p:nvPr/>
         </p:nvSpPr>
         <p:spPr>
           <a:xfrm>
             <a:off x="311810" y="1005840"/>
-            <a:ext cx="7772400" cy="3200400"/>
+            <a:ext cx="4572000" cy="3200400"/>
           </a:xfrm>
           <a:prstGeom prst="rect">
             <a:avLst/>
@@ -5592,25 +5616,6 @@
             </a:pPr>
             <a:r>
               <a:t>Supporters wanted time to study health and environmental risks before building more.</a:t>
-            </a:r>
-          </a:p>
-          <a:p>
-            <a:pPr>
-              <a:lnSpc>
-                <a:spcPts val="1920"/>
-              </a:lnSpc>
-              <a:spcAft>
-                <a:spcPts val="400"/>
-              </a:spcAft>
-              <a:defRPr sz="1600">
-                <a:solidFill>
-                  <a:srgbClr val="1A1A1A"/>
-                </a:solidFill>
-                <a:latin typeface="Calibri"/>
-              </a:defRPr>
-            </a:pPr>
-            <a:r>
-              <a:t>[PLACEHOLDER: Insert photo of artificial turf field here]</a:t>
             </a:r>
           </a:p>
         </p:txBody>

--- a/Town_Meeting_Video_Slides.pptx
+++ b/Town_Meeting_Video_Slides.pptx
@@ -16,7 +16,6 @@
     <p:sldId id="264" r:id="rId15"/>
     <p:sldId id="265" r:id="rId16"/>
     <p:sldId id="266" r:id="rId17"/>
-    <p:sldId id="267" r:id="rId18"/>
   </p:sldIdLst>
   <p:sldSz cx="9144000" cy="5143500" type="screen4x3"/>
   <p:notesSz cx="6858000" cy="9144000"/>
@@ -3762,145 +3761,6 @@
             </a:pPr>
             <a:r>
               <a:t>Everyone’s vote is equal. That’s democracy in action!</a:t>
-            </a:r>
-          </a:p>
-        </p:txBody>
-      </p:sp>
-    </p:spTree>
-  </p:cSld>
-  <p:clrMapOvr>
-    <a:masterClrMapping/>
-  </p:clrMapOvr>
-</p:sld>
-</file>
-
-<file path=ppt/slides/slide12.xml><?xml version="1.0" encoding="utf-8"?>
-<p:sld xmlns:a="http://schemas.openxmlformats.org/drawingml/2006/main" xmlns:p="http://schemas.openxmlformats.org/presentationml/2006/main" xmlns:r="http://schemas.openxmlformats.org/officeDocument/2006/relationships">
-  <p:cSld>
-    <p:bg>
-      <p:bgPr>
-        <a:solidFill>
-          <a:srgbClr val="1B3A5C"/>
-        </a:solidFill>
-        <a:effectLst/>
-      </p:bgPr>
-    </p:bg>
-    <p:spTree>
-      <p:nvGrpSpPr>
-        <p:cNvPr id="1" name=""/>
-        <p:cNvGrpSpPr/>
-        <p:nvPr/>
-      </p:nvGrpSpPr>
-      <p:grpSpPr/>
-      <p:pic>
-        <p:nvPicPr>
-          <p:cNvPr id="2" name="Picture 1" descr="image.png"/>
-          <p:cNvPicPr>
-            <a:picLocks noChangeAspect="1"/>
-          </p:cNvPicPr>
-          <p:nvPr/>
-        </p:nvPicPr>
-        <p:blipFill>
-          <a:blip r:embed="rId2"/>
-          <a:stretch>
-            <a:fillRect/>
-          </a:stretch>
-        </p:blipFill>
-        <p:spPr>
-          <a:xfrm>
-            <a:off x="8128101" y="0"/>
-            <a:ext cx="1015898" cy="1015898"/>
-          </a:xfrm>
-          <a:prstGeom prst="rect">
-            <a:avLst/>
-          </a:prstGeom>
-        </p:spPr>
-      </p:pic>
-      <p:sp>
-        <p:nvSpPr>
-          <p:cNvPr id="3" name="TextBox 2"/>
-          <p:cNvSpPr txBox="1"/>
-          <p:nvPr/>
-        </p:nvSpPr>
-        <p:spPr>
-          <a:xfrm>
-            <a:off x="731520" y="1097280"/>
-            <a:ext cx="7680960" cy="640080"/>
-          </a:xfrm>
-          <a:prstGeom prst="rect">
-            <a:avLst/>
-          </a:prstGeom>
-          <a:noFill/>
-        </p:spPr>
-        <p:txBody>
-          <a:bodyPr wrap="square">
-            <a:spAutoFit/>
-          </a:bodyPr>
-          <a:lstStyle/>
-          <a:p>
-            <a:pPr algn="ctr">
-              <a:defRPr sz="2800" b="1">
-                <a:solidFill>
-                  <a:srgbClr val="FFFFFF"/>
-                </a:solidFill>
-                <a:latin typeface="Calibri"/>
-              </a:defRPr>
-            </a:pPr>
-            <a:r>
-              <a:t>Credits</a:t>
-            </a:r>
-          </a:p>
-        </p:txBody>
-      </p:sp>
-      <p:sp>
-        <p:nvSpPr>
-          <p:cNvPr id="4" name="TextBox 3"/>
-          <p:cNvSpPr txBox="1"/>
-          <p:nvPr/>
-        </p:nvSpPr>
-        <p:spPr>
-          <a:xfrm>
-            <a:off x="731520" y="2103120"/>
-            <a:ext cx="7680960" cy="1828800"/>
-          </a:xfrm>
-          <a:prstGeom prst="rect">
-            <a:avLst/>
-          </a:prstGeom>
-          <a:noFill/>
-        </p:spPr>
-        <p:txBody>
-          <a:bodyPr wrap="square">
-            <a:spAutoFit/>
-          </a:bodyPr>
-          <a:lstStyle/>
-          <a:p>
-            <a:pPr algn="ctr">
-              <a:defRPr sz="1600" b="0">
-                <a:solidFill>
-                  <a:srgbClr val="BBD5ED"/>
-                </a:solidFill>
-                <a:latin typeface="Calibri"/>
-              </a:defRPr>
-            </a:pPr>
-            <a:r>
-              <a:t>Sources:</a:t>
-            </a:r>
-            <a:br/>
-            <a:r>
-              <a:t>Natick Report · EcoNatick · Town of Natick</a:t>
-            </a:r>
-            <a:br/>
-            <a:r>
-              <a:t>Telvue Recording of Fall 2025 Town Meeting</a:t>
-            </a:r>
-            <a:br/>
-            <a:br/>
-            <a:r>
-              <a:t>Produced for Natick Public Schools</a:t>
-            </a:r>
-            <a:br/>
-            <a:r>
-              <a:t>© 2025</a:t>
             </a:r>
           </a:p>
         </p:txBody>

--- a/Town_Meeting_Video_Slides.pptx
+++ b/Town_Meeting_Video_Slides.pptx
@@ -3166,42 +3166,6 @@
             <a:br/>
             <a:r>
               <a:t>Two Big Decisions in Natick</a:t>
-            </a:r>
-          </a:p>
-        </p:txBody>
-      </p:sp>
-      <p:sp>
-        <p:nvSpPr>
-          <p:cNvPr id="4" name="TextBox 3"/>
-          <p:cNvSpPr txBox="1"/>
-          <p:nvPr/>
-        </p:nvSpPr>
-        <p:spPr>
-          <a:xfrm>
-            <a:off x="731520" y="2926080"/>
-            <a:ext cx="7680960" cy="548640"/>
-          </a:xfrm>
-          <a:prstGeom prst="rect">
-            <a:avLst/>
-          </a:prstGeom>
-          <a:noFill/>
-        </p:spPr>
-        <p:txBody>
-          <a:bodyPr wrap="square">
-            <a:spAutoFit/>
-          </a:bodyPr>
-          <a:lstStyle/>
-          <a:p>
-            <a:pPr algn="ctr">
-              <a:defRPr sz="1800" b="0">
-                <a:solidFill>
-                  <a:srgbClr val="BBD5ED"/>
-                </a:solidFill>
-                <a:latin typeface="Calibri"/>
-              </a:defRPr>
-            </a:pPr>
-            <a:r>
-              <a:t>A Natick Public Schools Learning Video</a:t>
             </a:r>
           </a:p>
         </p:txBody>

--- a/Town_Meeting_Video_Slides.pptx
+++ b/Town_Meeting_Video_Slides.pptx
@@ -3094,7 +3094,7 @@
     <p:bg>
       <p:bgPr>
         <a:solidFill>
-          <a:srgbClr val="1B3A5C"/>
+          <a:srgbClr val="FFFFFF"/>
         </a:solidFill>
         <a:effectLst/>
       </p:bgPr>
@@ -3155,7 +3155,7 @@
             <a:pPr algn="ctr">
               <a:defRPr sz="3200" b="1">
                 <a:solidFill>
-                  <a:srgbClr val="FFFFFF"/>
+                  <a:srgbClr val="1B3A5C"/>
                 </a:solidFill>
                 <a:latin typeface="Calibri"/>
               </a:defRPr>

--- a/Town_Meeting_Video_Slides.pptx
+++ b/Town_Meeting_Video_Slides.pptx
@@ -3824,7 +3824,7 @@
         <p:spPr>
           <a:xfrm>
             <a:off x="311810" y="1005840"/>
-            <a:ext cx="7772400" cy="3200400"/>
+            <a:ext cx="7772400" cy="2011680"/>
           </a:xfrm>
           <a:prstGeom prst="rect">
             <a:avLst/>
@@ -3916,36 +3916,324 @@
       </p:sp>
       <p:sp>
         <p:nvSpPr>
-          <p:cNvPr id="5" name="TextBox 4"/>
-          <p:cNvSpPr txBox="1"/>
+          <p:cNvPr id="5" name="Rounded Rectangle 4"/>
+          <p:cNvSpPr/>
           <p:nvPr/>
         </p:nvSpPr>
         <p:spPr>
           <a:xfrm>
-            <a:off x="311810" y="4114800"/>
-            <a:ext cx="4572000" cy="365760"/>
-          </a:xfrm>
-          <a:prstGeom prst="rect">
+            <a:off x="891539" y="3474720"/>
+            <a:ext cx="1463040" cy="640080"/>
+          </a:xfrm>
+          <a:prstGeom prst="roundRect">
             <a:avLst/>
           </a:prstGeom>
-          <a:noFill/>
-        </p:spPr>
-        <p:txBody>
-          <a:bodyPr wrap="square">
-            <a:spAutoFit/>
-          </a:bodyPr>
+          <a:solidFill>
+            <a:srgbClr val="FFFFFF"/>
+          </a:solidFill>
+          <a:ln w="19050">
+            <a:solidFill>
+              <a:srgbClr val="1B3A5C"/>
+            </a:solidFill>
+          </a:ln>
+        </p:spPr>
+        <p:style>
+          <a:lnRef idx="1">
+            <a:schemeClr val="accent1"/>
+          </a:lnRef>
+          <a:fillRef idx="3">
+            <a:schemeClr val="accent1"/>
+          </a:fillRef>
+          <a:effectRef idx="2">
+            <a:schemeClr val="accent1"/>
+          </a:effectRef>
+          <a:fontRef idx="minor">
+            <a:schemeClr val="lt1"/>
+          </a:fontRef>
+        </p:style>
+        <p:txBody>
+          <a:bodyPr rtlCol="0" anchor="ctr" wrap="square"/>
           <a:lstStyle/>
           <a:p>
             <a:pPr algn="ctr">
-              <a:defRPr sz="1600" b="1">
-                <a:solidFill>
-                  <a:srgbClr val="2E86AB"/>
-                </a:solidFill>
-                <a:latin typeface="Calibri"/>
-              </a:defRPr>
-            </a:pPr>
-            <a:r>
-              <a:t>Residents → Town Meeting → Vote → Decision</a:t>
+              <a:defRPr sz="1400" b="1">
+                <a:solidFill>
+                  <a:srgbClr val="1B3A5C"/>
+                </a:solidFill>
+              </a:defRPr>
+            </a:pPr>
+            <a:r>
+              <a:t>Residents</a:t>
+            </a:r>
+          </a:p>
+        </p:txBody>
+      </p:sp>
+      <p:cxnSp>
+        <p:nvCxnSpPr>
+          <p:cNvPr id="6" name="Connector 5"/>
+          <p:cNvCxnSpPr/>
+          <p:nvPr/>
+        </p:nvCxnSpPr>
+        <p:spPr>
+          <a:xfrm>
+            <a:off x="2400299" y="3794759"/>
+            <a:ext cx="411480" cy="0"/>
+          </a:xfrm>
+          <a:prstGeom prst="line">
+            <a:avLst/>
+          </a:prstGeom>
+          <a:ln w="25400">
+            <a:solidFill>
+              <a:srgbClr val="2E86AB"/>
+            </a:solidFill>
+            <a:tailEnd type="triangle" w="med" len="med"/>
+          </a:ln>
+        </p:spPr>
+        <p:style>
+          <a:lnRef idx="2">
+            <a:schemeClr val="accent1"/>
+          </a:lnRef>
+          <a:fillRef idx="0">
+            <a:schemeClr val="accent1"/>
+          </a:fillRef>
+          <a:effectRef idx="1">
+            <a:schemeClr val="accent1"/>
+          </a:effectRef>
+          <a:fontRef idx="minor">
+            <a:schemeClr val="tx1"/>
+          </a:fontRef>
+        </p:style>
+      </p:cxnSp>
+      <p:sp>
+        <p:nvSpPr>
+          <p:cNvPr id="7" name="Rounded Rectangle 6"/>
+          <p:cNvSpPr/>
+          <p:nvPr/>
+        </p:nvSpPr>
+        <p:spPr>
+          <a:xfrm>
+            <a:off x="2857500" y="3474720"/>
+            <a:ext cx="1463040" cy="640080"/>
+          </a:xfrm>
+          <a:prstGeom prst="roundRect">
+            <a:avLst/>
+          </a:prstGeom>
+          <a:solidFill>
+            <a:srgbClr val="FFFFFF"/>
+          </a:solidFill>
+          <a:ln w="19050">
+            <a:solidFill>
+              <a:srgbClr val="1B3A5C"/>
+            </a:solidFill>
+          </a:ln>
+        </p:spPr>
+        <p:style>
+          <a:lnRef idx="1">
+            <a:schemeClr val="accent1"/>
+          </a:lnRef>
+          <a:fillRef idx="3">
+            <a:schemeClr val="accent1"/>
+          </a:fillRef>
+          <a:effectRef idx="2">
+            <a:schemeClr val="accent1"/>
+          </a:effectRef>
+          <a:fontRef idx="minor">
+            <a:schemeClr val="lt1"/>
+          </a:fontRef>
+        </p:style>
+        <p:txBody>
+          <a:bodyPr rtlCol="0" anchor="ctr" wrap="square"/>
+          <a:lstStyle/>
+          <a:p>
+            <a:pPr algn="ctr">
+              <a:defRPr sz="1400" b="1">
+                <a:solidFill>
+                  <a:srgbClr val="1B3A5C"/>
+                </a:solidFill>
+              </a:defRPr>
+            </a:pPr>
+            <a:r>
+              <a:t>Town Meeting</a:t>
+            </a:r>
+          </a:p>
+        </p:txBody>
+      </p:sp>
+      <p:cxnSp>
+        <p:nvCxnSpPr>
+          <p:cNvPr id="8" name="Connector 7"/>
+          <p:cNvCxnSpPr/>
+          <p:nvPr/>
+        </p:nvCxnSpPr>
+        <p:spPr>
+          <a:xfrm>
+            <a:off x="4366259" y="3794759"/>
+            <a:ext cx="411481" cy="0"/>
+          </a:xfrm>
+          <a:prstGeom prst="line">
+            <a:avLst/>
+          </a:prstGeom>
+          <a:ln w="25400">
+            <a:solidFill>
+              <a:srgbClr val="2E86AB"/>
+            </a:solidFill>
+            <a:tailEnd type="triangle" w="med" len="med"/>
+          </a:ln>
+        </p:spPr>
+        <p:style>
+          <a:lnRef idx="2">
+            <a:schemeClr val="accent1"/>
+          </a:lnRef>
+          <a:fillRef idx="0">
+            <a:schemeClr val="accent1"/>
+          </a:fillRef>
+          <a:effectRef idx="1">
+            <a:schemeClr val="accent1"/>
+          </a:effectRef>
+          <a:fontRef idx="minor">
+            <a:schemeClr val="tx1"/>
+          </a:fontRef>
+        </p:style>
+      </p:cxnSp>
+      <p:sp>
+        <p:nvSpPr>
+          <p:cNvPr id="9" name="Rounded Rectangle 8"/>
+          <p:cNvSpPr/>
+          <p:nvPr/>
+        </p:nvSpPr>
+        <p:spPr>
+          <a:xfrm>
+            <a:off x="4823460" y="3474720"/>
+            <a:ext cx="1463040" cy="640080"/>
+          </a:xfrm>
+          <a:prstGeom prst="roundRect">
+            <a:avLst/>
+          </a:prstGeom>
+          <a:solidFill>
+            <a:srgbClr val="FFFFFF"/>
+          </a:solidFill>
+          <a:ln w="19050">
+            <a:solidFill>
+              <a:srgbClr val="1B3A5C"/>
+            </a:solidFill>
+          </a:ln>
+        </p:spPr>
+        <p:style>
+          <a:lnRef idx="1">
+            <a:schemeClr val="accent1"/>
+          </a:lnRef>
+          <a:fillRef idx="3">
+            <a:schemeClr val="accent1"/>
+          </a:fillRef>
+          <a:effectRef idx="2">
+            <a:schemeClr val="accent1"/>
+          </a:effectRef>
+          <a:fontRef idx="minor">
+            <a:schemeClr val="lt1"/>
+          </a:fontRef>
+        </p:style>
+        <p:txBody>
+          <a:bodyPr rtlCol="0" anchor="ctr" wrap="square"/>
+          <a:lstStyle/>
+          <a:p>
+            <a:pPr algn="ctr">
+              <a:defRPr sz="1400" b="1">
+                <a:solidFill>
+                  <a:srgbClr val="1B3A5C"/>
+                </a:solidFill>
+              </a:defRPr>
+            </a:pPr>
+            <a:r>
+              <a:t>Vote</a:t>
+            </a:r>
+          </a:p>
+        </p:txBody>
+      </p:sp>
+      <p:cxnSp>
+        <p:nvCxnSpPr>
+          <p:cNvPr id="10" name="Connector 9"/>
+          <p:cNvCxnSpPr/>
+          <p:nvPr/>
+        </p:nvCxnSpPr>
+        <p:spPr>
+          <a:xfrm>
+            <a:off x="6332220" y="3794759"/>
+            <a:ext cx="411480" cy="0"/>
+          </a:xfrm>
+          <a:prstGeom prst="line">
+            <a:avLst/>
+          </a:prstGeom>
+          <a:ln w="25400">
+            <a:solidFill>
+              <a:srgbClr val="2E86AB"/>
+            </a:solidFill>
+            <a:tailEnd type="triangle" w="med" len="med"/>
+          </a:ln>
+        </p:spPr>
+        <p:style>
+          <a:lnRef idx="2">
+            <a:schemeClr val="accent1"/>
+          </a:lnRef>
+          <a:fillRef idx="0">
+            <a:schemeClr val="accent1"/>
+          </a:fillRef>
+          <a:effectRef idx="1">
+            <a:schemeClr val="accent1"/>
+          </a:effectRef>
+          <a:fontRef idx="minor">
+            <a:schemeClr val="tx1"/>
+          </a:fontRef>
+        </p:style>
+      </p:cxnSp>
+      <p:sp>
+        <p:nvSpPr>
+          <p:cNvPr id="11" name="Rounded Rectangle 10"/>
+          <p:cNvSpPr/>
+          <p:nvPr/>
+        </p:nvSpPr>
+        <p:spPr>
+          <a:xfrm>
+            <a:off x="6789420" y="3474720"/>
+            <a:ext cx="1463040" cy="640080"/>
+          </a:xfrm>
+          <a:prstGeom prst="roundRect">
+            <a:avLst/>
+          </a:prstGeom>
+          <a:solidFill>
+            <a:srgbClr val="FFFFFF"/>
+          </a:solidFill>
+          <a:ln w="19050">
+            <a:solidFill>
+              <a:srgbClr val="1B3A5C"/>
+            </a:solidFill>
+          </a:ln>
+        </p:spPr>
+        <p:style>
+          <a:lnRef idx="1">
+            <a:schemeClr val="accent1"/>
+          </a:lnRef>
+          <a:fillRef idx="3">
+            <a:schemeClr val="accent1"/>
+          </a:fillRef>
+          <a:effectRef idx="2">
+            <a:schemeClr val="accent1"/>
+          </a:effectRef>
+          <a:fontRef idx="minor">
+            <a:schemeClr val="lt1"/>
+          </a:fontRef>
+        </p:style>
+        <p:txBody>
+          <a:bodyPr rtlCol="0" anchor="ctr" wrap="square"/>
+          <a:lstStyle/>
+          <a:p>
+            <a:pPr algn="ctr">
+              <a:defRPr sz="1400" b="1">
+                <a:solidFill>
+                  <a:srgbClr val="1B3A5C"/>
+                </a:solidFill>
+              </a:defRPr>
+            </a:pPr>
+            <a:r>
+              <a:t>Decision</a:t>
             </a:r>
           </a:p>
         </p:txBody>

--- a/Town_Meeting_Video_Slides.pptx
+++ b/Town_Meeting_Video_Slides.pptx
@@ -3852,7 +3852,7 @@
               </a:defRPr>
             </a:pPr>
             <a:r>
-              <a:t>In Massachusetts, many towns let residents vote on big decisions.</a:t>
+              <a:t>In Massachusetts, many towns let elected Town Meeting members vote on big decisions.</a:t>
             </a:r>
           </a:p>
           <a:p>
@@ -3871,7 +3871,7 @@
               </a:defRPr>
             </a:pPr>
             <a:r>
-              <a:t>Any resident can come to Town Meeting and vote — it is like a giant classroom vote for the whole town!</a:t>
+              <a:t>Elected Town Meeting members do the voting — but any resident can come and speak their mind.</a:t>
             </a:r>
           </a:p>
           <a:p>
